--- a/Documents/Prezentáció.pptx
+++ b/Documents/Prezentáció.pptx
@@ -11,6 +11,13 @@
     <p:sldId id="259" r:id="rId5"/>
     <p:sldId id="260" r:id="rId6"/>
     <p:sldId id="261" r:id="rId7"/>
+    <p:sldId id="262" r:id="rId8"/>
+    <p:sldId id="263" r:id="rId9"/>
+    <p:sldId id="264" r:id="rId10"/>
+    <p:sldId id="265" r:id="rId11"/>
+    <p:sldId id="266" r:id="rId12"/>
+    <p:sldId id="267" r:id="rId13"/>
+    <p:sldId id="268" r:id="rId14"/>
   </p:sldIdLst>
   <p:sldSz cx="12192000" cy="6858000"/>
   <p:notesSz cx="6858000" cy="9144000"/>
@@ -306,7 +313,7 @@
             <a:fld id="{B61BEF0D-F0BB-DE4B-95CE-6DB70DBA9567}" type="datetimeFigureOut">
               <a:rPr lang="en-US" dirty="0"/>
               <a:pPr/>
-              <a:t>9/19/2026</a:t>
+              <a:t>9/20/2026</a:t>
             </a:fld>
             <a:endParaRPr lang="en-US" dirty="0"/>
           </a:p>
@@ -412,6 +419,13 @@
             <a:noFill/>
           </a:ln>
         </p:spPr>
+        <p:txBody>
+          <a:bodyPr/>
+          <a:lstStyle/>
+          <a:p>
+            <a:endParaRPr lang="hu-HU" dirty="0"/>
+          </a:p>
+        </p:txBody>
       </p:sp>
       <p:sp>
         <p:nvSpPr>
@@ -641,7 +655,7 @@
             <a:fld id="{B61BEF0D-F0BB-DE4B-95CE-6DB70DBA9567}" type="datetimeFigureOut">
               <a:rPr lang="en-US" dirty="0"/>
               <a:pPr/>
-              <a:t>9/19/2026</a:t>
+              <a:t>9/20/2026</a:t>
             </a:fld>
             <a:endParaRPr lang="en-US" dirty="0"/>
           </a:p>
@@ -747,6 +761,13 @@
             <a:noFill/>
           </a:ln>
         </p:spPr>
+        <p:txBody>
+          <a:bodyPr/>
+          <a:lstStyle/>
+          <a:p>
+            <a:endParaRPr lang="hu-HU" dirty="0"/>
+          </a:p>
+        </p:txBody>
       </p:sp>
       <p:sp>
         <p:nvSpPr>
@@ -1039,7 +1060,7 @@
             <a:fld id="{B61BEF0D-F0BB-DE4B-95CE-6DB70DBA9567}" type="datetimeFigureOut">
               <a:rPr lang="en-US" dirty="0"/>
               <a:pPr/>
-              <a:t>9/19/2026</a:t>
+              <a:t>9/20/2026</a:t>
             </a:fld>
             <a:endParaRPr lang="en-US" dirty="0"/>
           </a:p>
@@ -1145,6 +1166,13 @@
             <a:noFill/>
           </a:ln>
         </p:spPr>
+        <p:txBody>
+          <a:bodyPr/>
+          <a:lstStyle/>
+          <a:p>
+            <a:endParaRPr lang="hu-HU" dirty="0"/>
+          </a:p>
+        </p:txBody>
       </p:sp>
       <p:sp>
         <p:nvSpPr>
@@ -1372,7 +1400,7 @@
             <a:fld id="{B61BEF0D-F0BB-DE4B-95CE-6DB70DBA9567}" type="datetimeFigureOut">
               <a:rPr lang="en-US" dirty="0"/>
               <a:pPr/>
-              <a:t>9/19/2026</a:t>
+              <a:t>9/20/2026</a:t>
             </a:fld>
             <a:endParaRPr lang="en-US" dirty="0"/>
           </a:p>
@@ -1478,6 +1506,13 @@
             <a:noFill/>
           </a:ln>
         </p:spPr>
+        <p:txBody>
+          <a:bodyPr/>
+          <a:lstStyle/>
+          <a:p>
+            <a:endParaRPr lang="hu-HU" dirty="0"/>
+          </a:p>
+        </p:txBody>
       </p:sp>
       <p:sp>
         <p:nvSpPr>
@@ -1689,7 +1724,7 @@
             <a:fld id="{B61BEF0D-F0BB-DE4B-95CE-6DB70DBA9567}" type="datetimeFigureOut">
               <a:rPr lang="en-US" dirty="0"/>
               <a:pPr/>
-              <a:t>9/19/2026</a:t>
+              <a:t>9/20/2026</a:t>
             </a:fld>
             <a:endParaRPr lang="en-US" dirty="0"/>
           </a:p>
@@ -1795,6 +1830,13 @@
             <a:noFill/>
           </a:ln>
         </p:spPr>
+        <p:txBody>
+          <a:bodyPr/>
+          <a:lstStyle/>
+          <a:p>
+            <a:endParaRPr lang="hu-HU" dirty="0"/>
+          </a:p>
+        </p:txBody>
       </p:sp>
       <p:sp>
         <p:nvSpPr>
@@ -2082,7 +2124,7 @@
             <a:fld id="{B61BEF0D-F0BB-DE4B-95CE-6DB70DBA9567}" type="datetimeFigureOut">
               <a:rPr lang="en-US" dirty="0"/>
               <a:pPr/>
-              <a:t>9/19/2026</a:t>
+              <a:t>9/20/2026</a:t>
             </a:fld>
             <a:endParaRPr lang="en-US" dirty="0"/>
           </a:p>
@@ -2188,6 +2230,13 @@
             <a:noFill/>
           </a:ln>
         </p:spPr>
+        <p:txBody>
+          <a:bodyPr/>
+          <a:lstStyle/>
+          <a:p>
+            <a:endParaRPr lang="hu-HU" dirty="0"/>
+          </a:p>
+        </p:txBody>
       </p:sp>
       <p:sp>
         <p:nvSpPr>
@@ -2336,7 +2385,7 @@
             <a:fld id="{B61BEF0D-F0BB-DE4B-95CE-6DB70DBA9567}" type="datetimeFigureOut">
               <a:rPr lang="en-US" dirty="0"/>
               <a:pPr/>
-              <a:t>9/19/2026</a:t>
+              <a:t>9/20/2026</a:t>
             </a:fld>
             <a:endParaRPr lang="en-US" dirty="0"/>
           </a:p>
@@ -2442,6 +2491,13 @@
             <a:noFill/>
           </a:ln>
         </p:spPr>
+        <p:txBody>
+          <a:bodyPr/>
+          <a:lstStyle/>
+          <a:p>
+            <a:endParaRPr lang="hu-HU" dirty="0"/>
+          </a:p>
+        </p:txBody>
       </p:sp>
       <p:sp>
         <p:nvSpPr>
@@ -2595,7 +2651,7 @@
             <a:fld id="{B61BEF0D-F0BB-DE4B-95CE-6DB70DBA9567}" type="datetimeFigureOut">
               <a:rPr lang="en-US" dirty="0"/>
               <a:pPr/>
-              <a:t>9/19/2026</a:t>
+              <a:t>9/20/2026</a:t>
             </a:fld>
             <a:endParaRPr lang="en-US" dirty="0"/>
           </a:p>
@@ -2701,6 +2757,13 @@
             <a:noFill/>
           </a:ln>
         </p:spPr>
+        <p:txBody>
+          <a:bodyPr/>
+          <a:lstStyle/>
+          <a:p>
+            <a:endParaRPr lang="hu-HU" dirty="0"/>
+          </a:p>
+        </p:txBody>
       </p:sp>
       <p:sp>
         <p:nvSpPr>
@@ -2854,7 +2917,7 @@
             <a:fld id="{B61BEF0D-F0BB-DE4B-95CE-6DB70DBA9567}" type="datetimeFigureOut">
               <a:rPr lang="en-US" dirty="0"/>
               <a:pPr/>
-              <a:t>9/19/2026</a:t>
+              <a:t>9/20/2026</a:t>
             </a:fld>
             <a:endParaRPr lang="en-US" dirty="0"/>
           </a:p>
@@ -2960,6 +3023,13 @@
             <a:noFill/>
           </a:ln>
         </p:spPr>
+        <p:txBody>
+          <a:bodyPr/>
+          <a:lstStyle/>
+          <a:p>
+            <a:endParaRPr lang="hu-HU" dirty="0"/>
+          </a:p>
+        </p:txBody>
       </p:sp>
       <p:sp>
         <p:nvSpPr>
@@ -3180,7 +3250,7 @@
             <a:fld id="{B61BEF0D-F0BB-DE4B-95CE-6DB70DBA9567}" type="datetimeFigureOut">
               <a:rPr lang="en-US" dirty="0"/>
               <a:pPr/>
-              <a:t>9/19/2026</a:t>
+              <a:t>9/20/2026</a:t>
             </a:fld>
             <a:endParaRPr lang="en-US" dirty="0"/>
           </a:p>
@@ -3286,6 +3356,13 @@
             <a:noFill/>
           </a:ln>
         </p:spPr>
+        <p:txBody>
+          <a:bodyPr/>
+          <a:lstStyle/>
+          <a:p>
+            <a:endParaRPr lang="hu-HU" dirty="0"/>
+          </a:p>
+        </p:txBody>
       </p:sp>
       <p:sp>
         <p:nvSpPr>
@@ -3500,7 +3577,7 @@
             <a:fld id="{B61BEF0D-F0BB-DE4B-95CE-6DB70DBA9567}" type="datetimeFigureOut">
               <a:rPr lang="en-US" dirty="0"/>
               <a:pPr/>
-              <a:t>9/19/2026</a:t>
+              <a:t>9/20/2026</a:t>
             </a:fld>
             <a:endParaRPr lang="en-US" dirty="0"/>
           </a:p>
@@ -3606,6 +3683,13 @@
             <a:noFill/>
           </a:ln>
         </p:spPr>
+        <p:txBody>
+          <a:bodyPr/>
+          <a:lstStyle/>
+          <a:p>
+            <a:endParaRPr lang="hu-HU" dirty="0"/>
+          </a:p>
+        </p:txBody>
       </p:sp>
       <p:sp>
         <p:nvSpPr>
@@ -3954,7 +4038,7 @@
             <a:fld id="{B61BEF0D-F0BB-DE4B-95CE-6DB70DBA9567}" type="datetimeFigureOut">
               <a:rPr lang="en-US" dirty="0"/>
               <a:pPr/>
-              <a:t>9/19/2026</a:t>
+              <a:t>9/20/2026</a:t>
             </a:fld>
             <a:endParaRPr lang="en-US" dirty="0"/>
           </a:p>
@@ -4060,6 +4144,13 @@
             <a:noFill/>
           </a:ln>
         </p:spPr>
+        <p:txBody>
+          <a:bodyPr/>
+          <a:lstStyle/>
+          <a:p>
+            <a:endParaRPr lang="hu-HU" dirty="0"/>
+          </a:p>
+        </p:txBody>
       </p:sp>
       <p:sp>
         <p:nvSpPr>
@@ -4156,7 +4247,7 @@
             <a:fld id="{B61BEF0D-F0BB-DE4B-95CE-6DB70DBA9567}" type="datetimeFigureOut">
               <a:rPr lang="en-US" dirty="0"/>
               <a:pPr/>
-              <a:t>9/19/2026</a:t>
+              <a:t>9/20/2026</a:t>
             </a:fld>
             <a:endParaRPr lang="en-US" dirty="0"/>
           </a:p>
@@ -4262,6 +4353,13 @@
             <a:noFill/>
           </a:ln>
         </p:spPr>
+        <p:txBody>
+          <a:bodyPr/>
+          <a:lstStyle/>
+          <a:p>
+            <a:endParaRPr lang="hu-HU" dirty="0"/>
+          </a:p>
+        </p:txBody>
       </p:sp>
       <p:sp>
         <p:nvSpPr>
@@ -4330,7 +4428,7 @@
             <a:fld id="{B61BEF0D-F0BB-DE4B-95CE-6DB70DBA9567}" type="datetimeFigureOut">
               <a:rPr lang="en-US" dirty="0"/>
               <a:pPr/>
-              <a:t>9/19/2026</a:t>
+              <a:t>9/20/2026</a:t>
             </a:fld>
             <a:endParaRPr lang="en-US" dirty="0"/>
           </a:p>
@@ -4436,6 +4534,13 @@
             <a:noFill/>
           </a:ln>
         </p:spPr>
+        <p:txBody>
+          <a:bodyPr/>
+          <a:lstStyle/>
+          <a:p>
+            <a:endParaRPr lang="hu-HU" dirty="0"/>
+          </a:p>
+        </p:txBody>
       </p:sp>
       <p:sp>
         <p:nvSpPr>
@@ -4660,7 +4765,7 @@
             <a:fld id="{B61BEF0D-F0BB-DE4B-95CE-6DB70DBA9567}" type="datetimeFigureOut">
               <a:rPr lang="en-US" dirty="0"/>
               <a:pPr/>
-              <a:t>9/19/2026</a:t>
+              <a:t>9/20/2026</a:t>
             </a:fld>
             <a:endParaRPr lang="en-US" dirty="0"/>
           </a:p>
@@ -4766,6 +4871,13 @@
             <a:noFill/>
           </a:ln>
         </p:spPr>
+        <p:txBody>
+          <a:bodyPr/>
+          <a:lstStyle/>
+          <a:p>
+            <a:endParaRPr lang="hu-HU" dirty="0"/>
+          </a:p>
+        </p:txBody>
       </p:sp>
       <p:sp>
         <p:nvSpPr>
@@ -5002,7 +5114,7 @@
             <a:fld id="{B61BEF0D-F0BB-DE4B-95CE-6DB70DBA9567}" type="datetimeFigureOut">
               <a:rPr lang="en-US" dirty="0"/>
               <a:pPr/>
-              <a:t>9/19/2026</a:t>
+              <a:t>9/20/2026</a:t>
             </a:fld>
             <a:endParaRPr lang="en-US" dirty="0"/>
           </a:p>
@@ -5108,6 +5220,13 @@
             <a:noFill/>
           </a:ln>
         </p:spPr>
+        <p:txBody>
+          <a:bodyPr/>
+          <a:lstStyle/>
+          <a:p>
+            <a:endParaRPr lang="hu-HU" dirty="0"/>
+          </a:p>
+        </p:txBody>
       </p:sp>
       <p:sp>
         <p:nvSpPr>
@@ -5242,6 +5361,13 @@
               <a:noFill/>
             </a:ln>
           </p:spPr>
+          <p:txBody>
+            <a:bodyPr/>
+            <a:lstStyle/>
+            <a:p>
+              <a:endParaRPr lang="hu-HU" dirty="0"/>
+            </a:p>
+          </p:txBody>
         </p:sp>
         <p:sp>
           <p:nvSpPr>
@@ -5308,6 +5434,13 @@
               <a:noFill/>
             </a:ln>
           </p:spPr>
+          <p:txBody>
+            <a:bodyPr/>
+            <a:lstStyle/>
+            <a:p>
+              <a:endParaRPr lang="hu-HU" dirty="0"/>
+            </a:p>
+          </p:txBody>
         </p:sp>
         <p:sp>
           <p:nvSpPr>
@@ -5379,6 +5512,13 @@
               <a:noFill/>
             </a:ln>
           </p:spPr>
+          <p:txBody>
+            <a:bodyPr/>
+            <a:lstStyle/>
+            <a:p>
+              <a:endParaRPr lang="hu-HU" dirty="0"/>
+            </a:p>
+          </p:txBody>
         </p:sp>
         <p:sp>
           <p:nvSpPr>
@@ -5430,6 +5570,13 @@
               <a:noFill/>
             </a:ln>
           </p:spPr>
+          <p:txBody>
+            <a:bodyPr/>
+            <a:lstStyle/>
+            <a:p>
+              <a:endParaRPr lang="hu-HU" dirty="0"/>
+            </a:p>
+          </p:txBody>
         </p:sp>
         <p:sp>
           <p:nvSpPr>
@@ -5516,6 +5663,13 @@
               <a:noFill/>
             </a:ln>
           </p:spPr>
+          <p:txBody>
+            <a:bodyPr/>
+            <a:lstStyle/>
+            <a:p>
+              <a:endParaRPr lang="hu-HU" dirty="0"/>
+            </a:p>
+          </p:txBody>
         </p:sp>
         <p:sp>
           <p:nvSpPr>
@@ -5597,6 +5751,13 @@
               <a:noFill/>
             </a:ln>
           </p:spPr>
+          <p:txBody>
+            <a:bodyPr/>
+            <a:lstStyle/>
+            <a:p>
+              <a:endParaRPr lang="hu-HU" dirty="0"/>
+            </a:p>
+          </p:txBody>
         </p:sp>
         <p:sp>
           <p:nvSpPr>
@@ -5658,6 +5819,13 @@
               <a:noFill/>
             </a:ln>
           </p:spPr>
+          <p:txBody>
+            <a:bodyPr/>
+            <a:lstStyle/>
+            <a:p>
+              <a:endParaRPr lang="hu-HU" dirty="0"/>
+            </a:p>
+          </p:txBody>
         </p:sp>
         <p:sp>
           <p:nvSpPr>
@@ -5739,6 +5907,13 @@
               <a:noFill/>
             </a:ln>
           </p:spPr>
+          <p:txBody>
+            <a:bodyPr/>
+            <a:lstStyle/>
+            <a:p>
+              <a:endParaRPr lang="hu-HU" dirty="0"/>
+            </a:p>
+          </p:txBody>
         </p:sp>
         <p:sp>
           <p:nvSpPr>
@@ -5855,6 +6030,13 @@
               <a:noFill/>
             </a:ln>
           </p:spPr>
+          <p:txBody>
+            <a:bodyPr/>
+            <a:lstStyle/>
+            <a:p>
+              <a:endParaRPr lang="hu-HU" dirty="0"/>
+            </a:p>
+          </p:txBody>
         </p:sp>
         <p:sp>
           <p:nvSpPr>
@@ -5906,6 +6088,13 @@
               <a:noFill/>
             </a:ln>
           </p:spPr>
+          <p:txBody>
+            <a:bodyPr/>
+            <a:lstStyle/>
+            <a:p>
+              <a:endParaRPr lang="hu-HU" dirty="0"/>
+            </a:p>
+          </p:txBody>
         </p:sp>
         <p:sp>
           <p:nvSpPr>
@@ -5967,6 +6156,13 @@
               <a:noFill/>
             </a:ln>
           </p:spPr>
+          <p:txBody>
+            <a:bodyPr/>
+            <a:lstStyle/>
+            <a:p>
+              <a:endParaRPr lang="hu-HU" dirty="0"/>
+            </a:p>
+          </p:txBody>
         </p:sp>
         <p:sp>
           <p:nvSpPr>
@@ -6038,6 +6234,13 @@
               <a:noFill/>
             </a:ln>
           </p:spPr>
+          <p:txBody>
+            <a:bodyPr/>
+            <a:lstStyle/>
+            <a:p>
+              <a:endParaRPr lang="hu-HU" dirty="0"/>
+            </a:p>
+          </p:txBody>
         </p:sp>
       </p:grpSp>
       <p:grpSp>
@@ -6157,6 +6360,13 @@
               <a:noFill/>
             </a:ln>
           </p:spPr>
+          <p:txBody>
+            <a:bodyPr/>
+            <a:lstStyle/>
+            <a:p>
+              <a:endParaRPr lang="hu-HU" dirty="0"/>
+            </a:p>
+          </p:txBody>
         </p:sp>
         <p:sp>
           <p:nvSpPr>
@@ -6226,6 +6436,13 @@
               <a:noFill/>
             </a:ln>
           </p:spPr>
+          <p:txBody>
+            <a:bodyPr/>
+            <a:lstStyle/>
+            <a:p>
+              <a:endParaRPr lang="hu-HU" dirty="0"/>
+            </a:p>
+          </p:txBody>
         </p:sp>
         <p:sp>
           <p:nvSpPr>
@@ -6295,6 +6512,13 @@
               <a:noFill/>
             </a:ln>
           </p:spPr>
+          <p:txBody>
+            <a:bodyPr/>
+            <a:lstStyle/>
+            <a:p>
+              <a:endParaRPr lang="hu-HU" dirty="0"/>
+            </a:p>
+          </p:txBody>
         </p:sp>
         <p:sp>
           <p:nvSpPr>
@@ -6379,6 +6603,13 @@
               <a:noFill/>
             </a:ln>
           </p:spPr>
+          <p:txBody>
+            <a:bodyPr/>
+            <a:lstStyle/>
+            <a:p>
+              <a:endParaRPr lang="hu-HU" dirty="0"/>
+            </a:p>
+          </p:txBody>
         </p:sp>
         <p:sp>
           <p:nvSpPr>
@@ -6473,6 +6704,13 @@
               <a:noFill/>
             </a:ln>
           </p:spPr>
+          <p:txBody>
+            <a:bodyPr/>
+            <a:lstStyle/>
+            <a:p>
+              <a:endParaRPr lang="hu-HU" dirty="0"/>
+            </a:p>
+          </p:txBody>
         </p:sp>
         <p:sp>
           <p:nvSpPr>
@@ -6522,6 +6760,13 @@
               <a:noFill/>
             </a:ln>
           </p:spPr>
+          <p:txBody>
+            <a:bodyPr/>
+            <a:lstStyle/>
+            <a:p>
+              <a:endParaRPr lang="hu-HU" dirty="0"/>
+            </a:p>
+          </p:txBody>
         </p:sp>
         <p:sp>
           <p:nvSpPr>
@@ -6586,6 +6831,13 @@
               <a:noFill/>
             </a:ln>
           </p:spPr>
+          <p:txBody>
+            <a:bodyPr/>
+            <a:lstStyle/>
+            <a:p>
+              <a:endParaRPr lang="hu-HU" dirty="0"/>
+            </a:p>
+          </p:txBody>
         </p:sp>
         <p:sp>
           <p:nvSpPr>
@@ -6695,6 +6947,13 @@
               <a:noFill/>
             </a:ln>
           </p:spPr>
+          <p:txBody>
+            <a:bodyPr/>
+            <a:lstStyle/>
+            <a:p>
+              <a:endParaRPr lang="hu-HU" dirty="0"/>
+            </a:p>
+          </p:txBody>
         </p:sp>
         <p:sp>
           <p:nvSpPr>
@@ -6744,6 +7003,13 @@
               <a:noFill/>
             </a:ln>
           </p:spPr>
+          <p:txBody>
+            <a:bodyPr/>
+            <a:lstStyle/>
+            <a:p>
+              <a:endParaRPr lang="hu-HU" dirty="0"/>
+            </a:p>
+          </p:txBody>
         </p:sp>
         <p:sp>
           <p:nvSpPr>
@@ -6813,6 +7079,13 @@
               <a:noFill/>
             </a:ln>
           </p:spPr>
+          <p:txBody>
+            <a:bodyPr/>
+            <a:lstStyle/>
+            <a:p>
+              <a:endParaRPr lang="hu-HU" dirty="0"/>
+            </a:p>
+          </p:txBody>
         </p:sp>
         <p:sp>
           <p:nvSpPr>
@@ -6877,6 +7150,13 @@
               <a:noFill/>
             </a:ln>
           </p:spPr>
+          <p:txBody>
+            <a:bodyPr/>
+            <a:lstStyle/>
+            <a:p>
+              <a:endParaRPr lang="hu-HU" dirty="0"/>
+            </a:p>
+          </p:txBody>
         </p:sp>
         <p:sp>
           <p:nvSpPr>
@@ -6946,6 +7226,13 @@
               <a:noFill/>
             </a:ln>
           </p:spPr>
+          <p:txBody>
+            <a:bodyPr/>
+            <a:lstStyle/>
+            <a:p>
+              <a:endParaRPr lang="hu-HU" dirty="0"/>
+            </a:p>
+          </p:txBody>
         </p:sp>
       </p:grpSp>
       <p:sp>
@@ -6984,6 +7271,13 @@
             <a:schemeClr val="lt1"/>
           </a:fontRef>
         </p:style>
+        <p:txBody>
+          <a:bodyPr/>
+          <a:lstStyle/>
+          <a:p>
+            <a:endParaRPr lang="hu-HU" dirty="0"/>
+          </a:p>
+        </p:txBody>
       </p:sp>
       <p:sp>
         <p:nvSpPr>
@@ -7116,7 +7410,7 @@
             <a:fld id="{B61BEF0D-F0BB-DE4B-95CE-6DB70DBA9567}" type="datetimeFigureOut">
               <a:rPr lang="en-US" dirty="0"/>
               <a:pPr/>
-              <a:t>9/19/2026</a:t>
+              <a:t>9/20/2026</a:t>
             </a:fld>
             <a:endParaRPr lang="en-US" dirty="0"/>
           </a:p>
@@ -7735,6 +8029,438 @@
 </p:sld>
 </file>
 
+<file path=ppt/slides/slide10.xml><?xml version="1.0" encoding="utf-8"?>
+<p:sld xmlns:a="http://schemas.openxmlformats.org/drawingml/2006/main" xmlns:r="http://schemas.openxmlformats.org/officeDocument/2006/relationships" xmlns:p="http://schemas.openxmlformats.org/presentationml/2006/main">
+  <p:cSld>
+    <p:spTree>
+      <p:nvGrpSpPr>
+        <p:cNvPr id="1" name=""/>
+        <p:cNvGrpSpPr/>
+        <p:nvPr/>
+      </p:nvGrpSpPr>
+      <p:grpSpPr>
+        <a:xfrm>
+          <a:off x="0" y="0"/>
+          <a:ext cx="0" cy="0"/>
+          <a:chOff x="0" y="0"/>
+          <a:chExt cx="0" cy="0"/>
+        </a:xfrm>
+      </p:grpSpPr>
+      <p:sp>
+        <p:nvSpPr>
+          <p:cNvPr id="2" name="Cím 1">
+            <a:extLst>
+              <a:ext uri="{FF2B5EF4-FFF2-40B4-BE49-F238E27FC236}">
+                <a16:creationId xmlns:a16="http://schemas.microsoft.com/office/drawing/2014/main" id="{B7BA07A5-4E26-5070-178E-ED07FB708862}"/>
+              </a:ext>
+            </a:extLst>
+          </p:cNvPr>
+          <p:cNvSpPr>
+            <a:spLocks noGrp="1"/>
+          </p:cNvSpPr>
+          <p:nvPr>
+            <p:ph type="title"/>
+          </p:nvPr>
+        </p:nvSpPr>
+        <p:spPr>
+          <a:xfrm>
+            <a:off x="2592925" y="624110"/>
+            <a:ext cx="8911687" cy="704358"/>
+          </a:xfrm>
+        </p:spPr>
+        <p:txBody>
+          <a:bodyPr/>
+          <a:lstStyle/>
+          <a:p>
+            <a:pPr algn="ctr"/>
+            <a:r>
+              <a:rPr lang="hu-HU" dirty="0"/>
+              <a:t>Fejlesztés közbeni használat, tesztelés</a:t>
+            </a:r>
+          </a:p>
+        </p:txBody>
+      </p:sp>
+      <p:sp>
+        <p:nvSpPr>
+          <p:cNvPr id="3" name="Tartalom helye 2">
+            <a:extLst>
+              <a:ext uri="{FF2B5EF4-FFF2-40B4-BE49-F238E27FC236}">
+                <a16:creationId xmlns:a16="http://schemas.microsoft.com/office/drawing/2014/main" id="{572078DE-6826-1C8D-B2A7-1AA4EB925415}"/>
+              </a:ext>
+            </a:extLst>
+          </p:cNvPr>
+          <p:cNvSpPr>
+            <a:spLocks noGrp="1"/>
+          </p:cNvSpPr>
+          <p:nvPr>
+            <p:ph idx="1"/>
+          </p:nvPr>
+        </p:nvSpPr>
+        <p:spPr>
+          <a:xfrm>
+            <a:off x="2589212" y="2070340"/>
+            <a:ext cx="8915400" cy="3840882"/>
+          </a:xfrm>
+        </p:spPr>
+        <p:txBody>
+          <a:bodyPr/>
+          <a:lstStyle/>
+          <a:p>
+            <a:r>
+              <a:rPr lang="hu-HU" dirty="0"/>
+              <a:t>Fejlesztés közben a Scalar segédprogramot használtuk, valamint a Postman alkalmazást;</a:t>
+            </a:r>
+          </a:p>
+          <a:p>
+            <a:r>
+              <a:rPr lang="hu-HU" dirty="0"/>
+              <a:t>Ezekkel a Backend-et lehet tesztelni, megtalálni a hibás működést;</a:t>
+            </a:r>
+          </a:p>
+          <a:p>
+            <a:r>
+              <a:rPr lang="hu-HU" dirty="0"/>
+              <a:t>A Frontend hibakereséséhez a Console-ba írással, és a böngésző fejlesztői eszközök segítségét lehet igénybe venni;</a:t>
+            </a:r>
+          </a:p>
+        </p:txBody>
+      </p:sp>
+    </p:spTree>
+    <p:extLst>
+      <p:ext uri="{BB962C8B-B14F-4D97-AF65-F5344CB8AC3E}">
+        <p14:creationId xmlns:p14="http://schemas.microsoft.com/office/powerpoint/2010/main" val="2355847077"/>
+      </p:ext>
+    </p:extLst>
+  </p:cSld>
+  <p:clrMapOvr>
+    <a:masterClrMapping/>
+  </p:clrMapOvr>
+</p:sld>
+</file>
+
+<file path=ppt/slides/slide11.xml><?xml version="1.0" encoding="utf-8"?>
+<p:sld xmlns:a="http://schemas.openxmlformats.org/drawingml/2006/main" xmlns:r="http://schemas.openxmlformats.org/officeDocument/2006/relationships" xmlns:p="http://schemas.openxmlformats.org/presentationml/2006/main">
+  <p:cSld>
+    <p:spTree>
+      <p:nvGrpSpPr>
+        <p:cNvPr id="1" name=""/>
+        <p:cNvGrpSpPr/>
+        <p:nvPr/>
+      </p:nvGrpSpPr>
+      <p:grpSpPr>
+        <a:xfrm>
+          <a:off x="0" y="0"/>
+          <a:ext cx="0" cy="0"/>
+          <a:chOff x="0" y="0"/>
+          <a:chExt cx="0" cy="0"/>
+        </a:xfrm>
+      </p:grpSpPr>
+      <p:sp>
+        <p:nvSpPr>
+          <p:cNvPr id="2" name="Cím 1">
+            <a:extLst>
+              <a:ext uri="{FF2B5EF4-FFF2-40B4-BE49-F238E27FC236}">
+                <a16:creationId xmlns:a16="http://schemas.microsoft.com/office/drawing/2014/main" id="{1637B408-0355-6254-EE74-381EE06E2671}"/>
+              </a:ext>
+            </a:extLst>
+          </p:cNvPr>
+          <p:cNvSpPr>
+            <a:spLocks noGrp="1"/>
+          </p:cNvSpPr>
+          <p:nvPr>
+            <p:ph type="title"/>
+          </p:nvPr>
+        </p:nvSpPr>
+        <p:spPr>
+          <a:xfrm>
+            <a:off x="2592925" y="624110"/>
+            <a:ext cx="8911687" cy="687105"/>
+          </a:xfrm>
+        </p:spPr>
+        <p:txBody>
+          <a:bodyPr/>
+          <a:lstStyle/>
+          <a:p>
+            <a:pPr algn="ctr"/>
+            <a:r>
+              <a:rPr lang="hu-HU" dirty="0"/>
+              <a:t>A program élőben</a:t>
+            </a:r>
+          </a:p>
+        </p:txBody>
+      </p:sp>
+      <p:pic>
+        <p:nvPicPr>
+          <p:cNvPr id="5" name="Tartalom helye 4">
+            <a:extLst>
+              <a:ext uri="{FF2B5EF4-FFF2-40B4-BE49-F238E27FC236}">
+                <a16:creationId xmlns:a16="http://schemas.microsoft.com/office/drawing/2014/main" id="{D9CD9BB7-7C5A-C107-4D7E-5CF80290C014}"/>
+              </a:ext>
+            </a:extLst>
+          </p:cNvPr>
+          <p:cNvPicPr>
+            <a:picLocks noGrp="1" noChangeAspect="1"/>
+          </p:cNvPicPr>
+          <p:nvPr>
+            <p:ph idx="1"/>
+          </p:nvPr>
+        </p:nvPicPr>
+        <p:blipFill>
+          <a:blip r:embed="rId2"/>
+          <a:stretch>
+            <a:fillRect/>
+          </a:stretch>
+        </p:blipFill>
+        <p:spPr>
+          <a:xfrm>
+            <a:off x="2592925" y="1311214"/>
+            <a:ext cx="8911687" cy="4166559"/>
+          </a:xfrm>
+          <a:prstGeom prst="rect">
+            <a:avLst/>
+          </a:prstGeom>
+        </p:spPr>
+      </p:pic>
+      <p:sp>
+        <p:nvSpPr>
+          <p:cNvPr id="6" name="Szövegdoboz 5">
+            <a:extLst>
+              <a:ext uri="{FF2B5EF4-FFF2-40B4-BE49-F238E27FC236}">
+                <a16:creationId xmlns:a16="http://schemas.microsoft.com/office/drawing/2014/main" id="{D3C4417D-0806-CB8D-8E76-3BFF7FE7EFA7}"/>
+              </a:ext>
+            </a:extLst>
+          </p:cNvPr>
+          <p:cNvSpPr txBox="1"/>
+          <p:nvPr/>
+        </p:nvSpPr>
+        <p:spPr>
+          <a:xfrm>
+            <a:off x="3872257" y="5719313"/>
+            <a:ext cx="6353021" cy="369332"/>
+          </a:xfrm>
+          <a:prstGeom prst="rect">
+            <a:avLst/>
+          </a:prstGeom>
+          <a:noFill/>
+        </p:spPr>
+        <p:txBody>
+          <a:bodyPr wrap="none" rtlCol="0">
+            <a:spAutoFit/>
+          </a:bodyPr>
+          <a:lstStyle/>
+          <a:p>
+            <a:r>
+              <a:rPr lang="hu-HU" dirty="0"/>
+              <a:t>Az élő programot itt is meg lehet találni: </a:t>
+            </a:r>
+            <a:r>
+              <a:rPr lang="hu-HU" dirty="0">
+                <a:hlinkClick r:id="rId3"/>
+              </a:rPr>
+              <a:t>79.122.13.25:80</a:t>
+            </a:r>
+            <a:endParaRPr lang="hu-HU" dirty="0"/>
+          </a:p>
+        </p:txBody>
+      </p:sp>
+    </p:spTree>
+    <p:extLst>
+      <p:ext uri="{BB962C8B-B14F-4D97-AF65-F5344CB8AC3E}">
+        <p14:creationId xmlns:p14="http://schemas.microsoft.com/office/powerpoint/2010/main" val="325125691"/>
+      </p:ext>
+    </p:extLst>
+  </p:cSld>
+  <p:clrMapOvr>
+    <a:masterClrMapping/>
+  </p:clrMapOvr>
+</p:sld>
+</file>
+
+<file path=ppt/slides/slide12.xml><?xml version="1.0" encoding="utf-8"?>
+<p:sld xmlns:a="http://schemas.openxmlformats.org/drawingml/2006/main" xmlns:r="http://schemas.openxmlformats.org/officeDocument/2006/relationships" xmlns:p="http://schemas.openxmlformats.org/presentationml/2006/main">
+  <p:cSld>
+    <p:spTree>
+      <p:nvGrpSpPr>
+        <p:cNvPr id="1" name=""/>
+        <p:cNvGrpSpPr/>
+        <p:nvPr/>
+      </p:nvGrpSpPr>
+      <p:grpSpPr>
+        <a:xfrm>
+          <a:off x="0" y="0"/>
+          <a:ext cx="0" cy="0"/>
+          <a:chOff x="0" y="0"/>
+          <a:chExt cx="0" cy="0"/>
+        </a:xfrm>
+      </p:grpSpPr>
+      <p:sp>
+        <p:nvSpPr>
+          <p:cNvPr id="2" name="Cím 1">
+            <a:extLst>
+              <a:ext uri="{FF2B5EF4-FFF2-40B4-BE49-F238E27FC236}">
+                <a16:creationId xmlns:a16="http://schemas.microsoft.com/office/drawing/2014/main" id="{39D3675E-0CD9-C56A-ED4D-78A2F64DDA7D}"/>
+              </a:ext>
+            </a:extLst>
+          </p:cNvPr>
+          <p:cNvSpPr>
+            <a:spLocks noGrp="1"/>
+          </p:cNvSpPr>
+          <p:nvPr>
+            <p:ph type="title"/>
+          </p:nvPr>
+        </p:nvSpPr>
+        <p:spPr>
+          <a:xfrm>
+            <a:off x="2592925" y="624110"/>
+            <a:ext cx="8911687" cy="963150"/>
+          </a:xfrm>
+        </p:spPr>
+        <p:txBody>
+          <a:bodyPr/>
+          <a:lstStyle/>
+          <a:p>
+            <a:pPr algn="ctr"/>
+            <a:r>
+              <a:rPr lang="hu-HU" dirty="0"/>
+              <a:t>Tapasztalatok</a:t>
+            </a:r>
+          </a:p>
+        </p:txBody>
+      </p:sp>
+      <p:sp>
+        <p:nvSpPr>
+          <p:cNvPr id="3" name="Tartalom helye 2">
+            <a:extLst>
+              <a:ext uri="{FF2B5EF4-FFF2-40B4-BE49-F238E27FC236}">
+                <a16:creationId xmlns:a16="http://schemas.microsoft.com/office/drawing/2014/main" id="{493589CF-33BB-2CE7-B7F6-DEC57376E93F}"/>
+              </a:ext>
+            </a:extLst>
+          </p:cNvPr>
+          <p:cNvSpPr>
+            <a:spLocks noGrp="1"/>
+          </p:cNvSpPr>
+          <p:nvPr>
+            <p:ph idx="1"/>
+          </p:nvPr>
+        </p:nvSpPr>
+        <p:spPr>
+          <a:xfrm>
+            <a:off x="2589212" y="1587261"/>
+            <a:ext cx="8915400" cy="4323962"/>
+          </a:xfrm>
+        </p:spPr>
+        <p:txBody>
+          <a:bodyPr/>
+          <a:lstStyle/>
+          <a:p>
+            <a:r>
+              <a:rPr lang="hu-HU" dirty="0"/>
+              <a:t>Kialakult egy teljes kép a weboldalak felépítéséről, elkészítéséről;</a:t>
+            </a:r>
+          </a:p>
+          <a:p>
+            <a:endParaRPr lang="hu-HU" dirty="0"/>
+          </a:p>
+          <a:p>
+            <a:endParaRPr lang="hu-HU" dirty="0"/>
+          </a:p>
+          <a:p>
+            <a:r>
+              <a:rPr lang="hu-HU" dirty="0"/>
+              <a:t>Legközelebb a Frontend, a Backend és az adatbázis közötti változóneveket ugyanúgy nevezném el;</a:t>
+            </a:r>
+          </a:p>
+          <a:p>
+            <a:endParaRPr lang="hu-HU" dirty="0"/>
+          </a:p>
+          <a:p>
+            <a:endParaRPr lang="hu-HU" dirty="0"/>
+          </a:p>
+          <a:p>
+            <a:r>
+              <a:rPr lang="hu-HU" dirty="0"/>
+              <a:t>A weboldal használatához írt programokat át lehetett tenni egy Raspberry PI kártyaszámítógépre;</a:t>
+            </a:r>
+          </a:p>
+        </p:txBody>
+      </p:sp>
+    </p:spTree>
+    <p:extLst>
+      <p:ext uri="{BB962C8B-B14F-4D97-AF65-F5344CB8AC3E}">
+        <p14:creationId xmlns:p14="http://schemas.microsoft.com/office/powerpoint/2010/main" val="1610176013"/>
+      </p:ext>
+    </p:extLst>
+  </p:cSld>
+  <p:clrMapOvr>
+    <a:masterClrMapping/>
+  </p:clrMapOvr>
+</p:sld>
+</file>
+
+<file path=ppt/slides/slide13.xml><?xml version="1.0" encoding="utf-8"?>
+<p:sld xmlns:a="http://schemas.openxmlformats.org/drawingml/2006/main" xmlns:r="http://schemas.openxmlformats.org/officeDocument/2006/relationships" xmlns:p="http://schemas.openxmlformats.org/presentationml/2006/main">
+  <p:cSld>
+    <p:spTree>
+      <p:nvGrpSpPr>
+        <p:cNvPr id="1" name=""/>
+        <p:cNvGrpSpPr/>
+        <p:nvPr/>
+      </p:nvGrpSpPr>
+      <p:grpSpPr>
+        <a:xfrm>
+          <a:off x="0" y="0"/>
+          <a:ext cx="0" cy="0"/>
+          <a:chOff x="0" y="0"/>
+          <a:chExt cx="0" cy="0"/>
+        </a:xfrm>
+      </p:grpSpPr>
+      <p:sp>
+        <p:nvSpPr>
+          <p:cNvPr id="2" name="Cím 1">
+            <a:extLst>
+              <a:ext uri="{FF2B5EF4-FFF2-40B4-BE49-F238E27FC236}">
+                <a16:creationId xmlns:a16="http://schemas.microsoft.com/office/drawing/2014/main" id="{85008ACD-87BF-3770-6871-BB15B3E84233}"/>
+              </a:ext>
+            </a:extLst>
+          </p:cNvPr>
+          <p:cNvSpPr>
+            <a:spLocks noGrp="1"/>
+          </p:cNvSpPr>
+          <p:nvPr>
+            <p:ph type="title"/>
+          </p:nvPr>
+        </p:nvSpPr>
+        <p:spPr>
+          <a:xfrm>
+            <a:off x="1640156" y="2788555"/>
+            <a:ext cx="8911687" cy="1280890"/>
+          </a:xfrm>
+        </p:spPr>
+        <p:txBody>
+          <a:bodyPr/>
+          <a:lstStyle/>
+          <a:p>
+            <a:pPr algn="ctr"/>
+            <a:r>
+              <a:rPr lang="hu-HU" dirty="0"/>
+              <a:t>Köszönöm a figyelmet!</a:t>
+            </a:r>
+          </a:p>
+        </p:txBody>
+      </p:sp>
+    </p:spTree>
+    <p:extLst>
+      <p:ext uri="{BB962C8B-B14F-4D97-AF65-F5344CB8AC3E}">
+        <p14:creationId xmlns:p14="http://schemas.microsoft.com/office/powerpoint/2010/main" val="2763094421"/>
+      </p:ext>
+    </p:extLst>
+  </p:cSld>
+  <p:clrMapOvr>
+    <a:masterClrMapping/>
+  </p:clrMapOvr>
+</p:sld>
+</file>
+
 <file path=ppt/slides/slide2.xml><?xml version="1.0" encoding="utf-8"?>
 <p:sld xmlns:a="http://schemas.openxmlformats.org/drawingml/2006/main" xmlns:r="http://schemas.openxmlformats.org/officeDocument/2006/relationships" xmlns:p="http://schemas.openxmlformats.org/presentationml/2006/main">
   <p:cSld>
@@ -7820,7 +8546,7 @@
           <a:p>
             <a:r>
               <a:rPr lang="hu-HU" dirty="0"/>
-              <a:t>A nagykereskedés alkalmazottjai használják, mert Ők kötnek belőle koszorúalapot, vagy eladják, vagy…;</a:t>
+              <a:t>A nagykereskedés alkalmazottai használják, mert Ők kötnek belőle koszorúalapot, vagy eladják, vagy…;</a:t>
             </a:r>
           </a:p>
           <a:p>
@@ -7973,7 +8699,7 @@
           <a:p>
             <a:r>
               <a:rPr lang="hu-HU" dirty="0"/>
-              <a:t>A rendszer képes az adatok feldolgozására oly módon, hogy a különböző módon – eladott, lekötött, kiszállított – fenyőbálákat számolja, és azonnal kiírja a szabadon felhasználható mennyiséget;</a:t>
+              <a:t>A rendszer képes az adatok feldolgozására oly módon, hogy a különbözően kezelt – eladott, lekötött, kiszállított – fenyőbálákat számolja, és azonnal kiírja a szabadon felhasználható mennyiséget;</a:t>
             </a:r>
           </a:p>
         </p:txBody>
@@ -8160,9 +8886,8 @@
         </p:nvPicPr>
         <p:blipFill>
           <a:blip r:embed="rId2"/>
-          <a:stretch>
-            <a:fillRect/>
-          </a:stretch>
+          <a:srcRect/>
+          <a:stretch/>
         </p:blipFill>
         <p:spPr>
           <a:xfrm>
@@ -8278,19 +9003,16 @@
           <a:p>
             <a:r>
               <a:rPr lang="hu-HU" dirty="0"/>
-              <a:t>A DTO-k által biztosított adatokhoz való hozzáférést pedig a Controller-ek, biztosítják a Frontend-</a:t>
-            </a:r>
-            <a:r>
-              <a:rPr lang="hu-HU" dirty="0" err="1"/>
-              <a:t>től</a:t>
-            </a:r>
+              <a:t>A DTO-k által biztosított adatokhoz való hozzáférést pedig a Controller-ben található HTTP hívások mutatják az utat;</a:t>
+            </a:r>
+          </a:p>
+          <a:p>
+            <a:endParaRPr lang="hu-HU" dirty="0"/>
+          </a:p>
+          <a:p>
             <a:r>
               <a:rPr lang="hu-HU" dirty="0"/>
-              <a:t> a </a:t>
-            </a:r>
-            <a:r>
-              <a:rPr lang="hu-HU"/>
-              <a:t>Backend hívásokig;</a:t>
+              <a:t>A Frontend mögött megírt metódusok küldik a HTTP hívásokat, melyekre az előbb említett Controller-ek a megfelelő adatokkal térnek vissza;</a:t>
             </a:r>
           </a:p>
           <a:p>
@@ -8305,6 +9027,423 @@
     <p:extLst>
       <p:ext uri="{BB962C8B-B14F-4D97-AF65-F5344CB8AC3E}">
         <p14:creationId xmlns:p14="http://schemas.microsoft.com/office/powerpoint/2010/main" val="2940703441"/>
+      </p:ext>
+    </p:extLst>
+  </p:cSld>
+  <p:clrMapOvr>
+    <a:masterClrMapping/>
+  </p:clrMapOvr>
+</p:sld>
+</file>
+
+<file path=ppt/slides/slide7.xml><?xml version="1.0" encoding="utf-8"?>
+<p:sld xmlns:a="http://schemas.openxmlformats.org/drawingml/2006/main" xmlns:r="http://schemas.openxmlformats.org/officeDocument/2006/relationships" xmlns:p="http://schemas.openxmlformats.org/presentationml/2006/main">
+  <p:cSld>
+    <p:spTree>
+      <p:nvGrpSpPr>
+        <p:cNvPr id="1" name=""/>
+        <p:cNvGrpSpPr/>
+        <p:nvPr/>
+      </p:nvGrpSpPr>
+      <p:grpSpPr>
+        <a:xfrm>
+          <a:off x="0" y="0"/>
+          <a:ext cx="0" cy="0"/>
+          <a:chOff x="0" y="0"/>
+          <a:chExt cx="0" cy="0"/>
+        </a:xfrm>
+      </p:grpSpPr>
+      <p:sp>
+        <p:nvSpPr>
+          <p:cNvPr id="2" name="Cím 1">
+            <a:extLst>
+              <a:ext uri="{FF2B5EF4-FFF2-40B4-BE49-F238E27FC236}">
+                <a16:creationId xmlns:a16="http://schemas.microsoft.com/office/drawing/2014/main" id="{6082FAA1-B2EC-BC53-D70A-1A85D8A298AD}"/>
+              </a:ext>
+            </a:extLst>
+          </p:cNvPr>
+          <p:cNvSpPr>
+            <a:spLocks noGrp="1"/>
+          </p:cNvSpPr>
+          <p:nvPr>
+            <p:ph type="title"/>
+          </p:nvPr>
+        </p:nvSpPr>
+        <p:spPr/>
+        <p:txBody>
+          <a:bodyPr/>
+          <a:lstStyle/>
+          <a:p>
+            <a:pPr algn="ctr"/>
+            <a:r>
+              <a:rPr lang="hu-HU" dirty="0"/>
+              <a:t>Felhasznált technológiák</a:t>
+            </a:r>
+          </a:p>
+        </p:txBody>
+      </p:sp>
+      <p:sp>
+        <p:nvSpPr>
+          <p:cNvPr id="3" name="Tartalom helye 2">
+            <a:extLst>
+              <a:ext uri="{FF2B5EF4-FFF2-40B4-BE49-F238E27FC236}">
+                <a16:creationId xmlns:a16="http://schemas.microsoft.com/office/drawing/2014/main" id="{10A40E89-7F81-C162-92EC-A3C5E22A4656}"/>
+              </a:ext>
+            </a:extLst>
+          </p:cNvPr>
+          <p:cNvSpPr>
+            <a:spLocks noGrp="1"/>
+          </p:cNvSpPr>
+          <p:nvPr>
+            <p:ph idx="1"/>
+          </p:nvPr>
+        </p:nvSpPr>
+        <p:spPr/>
+        <p:txBody>
+          <a:bodyPr/>
+          <a:lstStyle/>
+          <a:p>
+            <a:r>
+              <a:rPr lang="hu-HU" dirty="0"/>
+              <a:t>A </a:t>
+            </a:r>
+            <a:r>
+              <a:rPr lang="hu-HU" b="1" dirty="0"/>
+              <a:t>Frontend</a:t>
+            </a:r>
+            <a:r>
+              <a:rPr lang="hu-HU" dirty="0"/>
+              <a:t> HTML, CSS, BootStrap, és Javascrtip nyelven készült, a Visual Studio Code fejlesztőkörnyezet segítségével;</a:t>
+            </a:r>
+          </a:p>
+          <a:p>
+            <a:r>
+              <a:rPr lang="hu-HU" dirty="0"/>
+              <a:t>Az </a:t>
+            </a:r>
+            <a:r>
+              <a:rPr lang="hu-HU" b="1" dirty="0"/>
+              <a:t>adatbázis</a:t>
+            </a:r>
+            <a:r>
+              <a:rPr lang="hu-HU" dirty="0"/>
+              <a:t> elkészítésében sokat segített a WAMP szerver, melyben MySQL használatával lett meg az adatbázis;</a:t>
+            </a:r>
+          </a:p>
+          <a:p>
+            <a:r>
+              <a:rPr lang="hu-HU" dirty="0"/>
+              <a:t>A </a:t>
+            </a:r>
+            <a:r>
+              <a:rPr lang="hu-HU" b="1" dirty="0"/>
+              <a:t>Backend</a:t>
+            </a:r>
+            <a:r>
+              <a:rPr lang="hu-HU" dirty="0"/>
+              <a:t> C# nyelven íródott a Microsoft Visual Studio támogatásával;</a:t>
+            </a:r>
+          </a:p>
+          <a:p>
+            <a:r>
+              <a:rPr lang="hu-HU" dirty="0"/>
+              <a:t>A projekt folyamatos követése és egymás közötti megosztásához s </a:t>
+            </a:r>
+            <a:r>
+              <a:rPr lang="hu-HU" b="1" dirty="0"/>
+              <a:t>GitHub</a:t>
+            </a:r>
+            <a:r>
+              <a:rPr lang="hu-HU" dirty="0"/>
+              <a:t> verziókezelő segített sokat;</a:t>
+            </a:r>
+          </a:p>
+        </p:txBody>
+      </p:sp>
+    </p:spTree>
+    <p:extLst>
+      <p:ext uri="{BB962C8B-B14F-4D97-AF65-F5344CB8AC3E}">
+        <p14:creationId xmlns:p14="http://schemas.microsoft.com/office/powerpoint/2010/main" val="990366266"/>
+      </p:ext>
+    </p:extLst>
+  </p:cSld>
+  <p:clrMapOvr>
+    <a:masterClrMapping/>
+  </p:clrMapOvr>
+</p:sld>
+</file>
+
+<file path=ppt/slides/slide8.xml><?xml version="1.0" encoding="utf-8"?>
+<p:sld xmlns:a="http://schemas.openxmlformats.org/drawingml/2006/main" xmlns:r="http://schemas.openxmlformats.org/officeDocument/2006/relationships" xmlns:p="http://schemas.openxmlformats.org/presentationml/2006/main">
+  <p:cSld>
+    <p:spTree>
+      <p:nvGrpSpPr>
+        <p:cNvPr id="1" name=""/>
+        <p:cNvGrpSpPr/>
+        <p:nvPr/>
+      </p:nvGrpSpPr>
+      <p:grpSpPr>
+        <a:xfrm>
+          <a:off x="0" y="0"/>
+          <a:ext cx="0" cy="0"/>
+          <a:chOff x="0" y="0"/>
+          <a:chExt cx="0" cy="0"/>
+        </a:xfrm>
+      </p:grpSpPr>
+      <p:sp>
+        <p:nvSpPr>
+          <p:cNvPr id="2" name="Cím 1">
+            <a:extLst>
+              <a:ext uri="{FF2B5EF4-FFF2-40B4-BE49-F238E27FC236}">
+                <a16:creationId xmlns:a16="http://schemas.microsoft.com/office/drawing/2014/main" id="{048E573A-3049-092C-632D-5E4C2D718714}"/>
+              </a:ext>
+            </a:extLst>
+          </p:cNvPr>
+          <p:cNvSpPr>
+            <a:spLocks noGrp="1"/>
+          </p:cNvSpPr>
+          <p:nvPr>
+            <p:ph type="title"/>
+          </p:nvPr>
+        </p:nvSpPr>
+        <p:spPr>
+          <a:xfrm>
+            <a:off x="2592925" y="624110"/>
+            <a:ext cx="8911687" cy="695732"/>
+          </a:xfrm>
+        </p:spPr>
+        <p:txBody>
+          <a:bodyPr/>
+          <a:lstStyle/>
+          <a:p>
+            <a:pPr algn="ctr"/>
+            <a:r>
+              <a:rPr lang="hu-HU" dirty="0"/>
+              <a:t>Hogyan készült?</a:t>
+            </a:r>
+          </a:p>
+        </p:txBody>
+      </p:sp>
+      <p:sp>
+        <p:nvSpPr>
+          <p:cNvPr id="3" name="Tartalom helye 2">
+            <a:extLst>
+              <a:ext uri="{FF2B5EF4-FFF2-40B4-BE49-F238E27FC236}">
+                <a16:creationId xmlns:a16="http://schemas.microsoft.com/office/drawing/2014/main" id="{55A5CCCE-85AD-0DE7-7033-69C03387FE53}"/>
+              </a:ext>
+            </a:extLst>
+          </p:cNvPr>
+          <p:cNvSpPr>
+            <a:spLocks noGrp="1"/>
+          </p:cNvSpPr>
+          <p:nvPr>
+            <p:ph idx="1"/>
+          </p:nvPr>
+        </p:nvSpPr>
+        <p:spPr>
+          <a:xfrm>
+            <a:off x="2589212" y="1319842"/>
+            <a:ext cx="8915400" cy="4591380"/>
+          </a:xfrm>
+        </p:spPr>
+        <p:txBody>
+          <a:bodyPr/>
+          <a:lstStyle/>
+          <a:p>
+            <a:r>
+              <a:rPr lang="hu-HU" dirty="0"/>
+              <a:t>Először a Frontend oldalai lettek elkészítve: Bejelentkezés, Fenyőbála, Koszorúalap, Vásárlók;</a:t>
+            </a:r>
+          </a:p>
+          <a:p>
+            <a:r>
+              <a:rPr lang="hu-HU" dirty="0"/>
+              <a:t>Majd az adatbázis, és annak táblái;</a:t>
+            </a:r>
+          </a:p>
+          <a:p>
+            <a:r>
+              <a:rPr lang="hu-HU" dirty="0"/>
+              <a:t>Ezután a Backend-be lett migrálva az adatbázis;</a:t>
+            </a:r>
+          </a:p>
+          <a:p>
+            <a:r>
+              <a:rPr lang="hu-HU" dirty="0"/>
+              <a:t>Ilyenkor már a HTTP hívásokat lehetett tesztelni. Érdemes odafigyelni a változónevekre;</a:t>
+            </a:r>
+          </a:p>
+          <a:p>
+            <a:r>
+              <a:rPr lang="hu-HU" dirty="0"/>
+              <a:t>Amint a HTTP hívások működnek, lehet folytatni a Frontend-Backend összeköttetéssel;</a:t>
+            </a:r>
+          </a:p>
+          <a:p>
+            <a:endParaRPr lang="hu-HU" dirty="0"/>
+          </a:p>
+        </p:txBody>
+      </p:sp>
+    </p:spTree>
+    <p:extLst>
+      <p:ext uri="{BB962C8B-B14F-4D97-AF65-F5344CB8AC3E}">
+        <p14:creationId xmlns:p14="http://schemas.microsoft.com/office/powerpoint/2010/main" val="1967878803"/>
+      </p:ext>
+    </p:extLst>
+  </p:cSld>
+  <p:clrMapOvr>
+    <a:masterClrMapping/>
+  </p:clrMapOvr>
+</p:sld>
+</file>
+
+<file path=ppt/slides/slide9.xml><?xml version="1.0" encoding="utf-8"?>
+<p:sld xmlns:a="http://schemas.openxmlformats.org/drawingml/2006/main" xmlns:r="http://schemas.openxmlformats.org/officeDocument/2006/relationships" xmlns:p="http://schemas.openxmlformats.org/presentationml/2006/main">
+  <p:cSld>
+    <p:spTree>
+      <p:nvGrpSpPr>
+        <p:cNvPr id="1" name=""/>
+        <p:cNvGrpSpPr/>
+        <p:nvPr/>
+      </p:nvGrpSpPr>
+      <p:grpSpPr>
+        <a:xfrm>
+          <a:off x="0" y="0"/>
+          <a:ext cx="0" cy="0"/>
+          <a:chOff x="0" y="0"/>
+          <a:chExt cx="0" cy="0"/>
+        </a:xfrm>
+      </p:grpSpPr>
+      <p:sp>
+        <p:nvSpPr>
+          <p:cNvPr id="2" name="Cím 1">
+            <a:extLst>
+              <a:ext uri="{FF2B5EF4-FFF2-40B4-BE49-F238E27FC236}">
+                <a16:creationId xmlns:a16="http://schemas.microsoft.com/office/drawing/2014/main" id="{3F1F6E16-7441-B00E-7670-CDA64E7CC307}"/>
+              </a:ext>
+            </a:extLst>
+          </p:cNvPr>
+          <p:cNvSpPr>
+            <a:spLocks noGrp="1"/>
+          </p:cNvSpPr>
+          <p:nvPr>
+            <p:ph type="title"/>
+          </p:nvPr>
+        </p:nvSpPr>
+        <p:spPr>
+          <a:xfrm>
+            <a:off x="2592925" y="624110"/>
+            <a:ext cx="8911687" cy="773369"/>
+          </a:xfrm>
+        </p:spPr>
+        <p:txBody>
+          <a:bodyPr/>
+          <a:lstStyle/>
+          <a:p>
+            <a:pPr algn="ctr"/>
+            <a:r>
+              <a:rPr lang="hu-HU" dirty="0"/>
+              <a:t>Egy szál a programból</a:t>
+            </a:r>
+          </a:p>
+        </p:txBody>
+      </p:sp>
+      <p:pic>
+        <p:nvPicPr>
+          <p:cNvPr id="5" name="Tartalom helye 4">
+            <a:extLst>
+              <a:ext uri="{FF2B5EF4-FFF2-40B4-BE49-F238E27FC236}">
+                <a16:creationId xmlns:a16="http://schemas.microsoft.com/office/drawing/2014/main" id="{B72C9C5F-8878-1FC9-6FF2-98F4241B3BD2}"/>
+              </a:ext>
+            </a:extLst>
+          </p:cNvPr>
+          <p:cNvPicPr>
+            <a:picLocks noGrp="1" noChangeAspect="1"/>
+          </p:cNvPicPr>
+          <p:nvPr>
+            <p:ph idx="1"/>
+          </p:nvPr>
+        </p:nvPicPr>
+        <p:blipFill>
+          <a:blip r:embed="rId2"/>
+          <a:stretch>
+            <a:fillRect/>
+          </a:stretch>
+        </p:blipFill>
+        <p:spPr>
+          <a:xfrm>
+            <a:off x="2592924" y="1397479"/>
+            <a:ext cx="3954525" cy="2294130"/>
+          </a:xfrm>
+          <a:prstGeom prst="rect">
+            <a:avLst/>
+          </a:prstGeom>
+        </p:spPr>
+      </p:pic>
+      <p:pic>
+        <p:nvPicPr>
+          <p:cNvPr id="7" name="Kép 6">
+            <a:extLst>
+              <a:ext uri="{FF2B5EF4-FFF2-40B4-BE49-F238E27FC236}">
+                <a16:creationId xmlns:a16="http://schemas.microsoft.com/office/drawing/2014/main" id="{F6AFAF7A-C4E8-C2CC-0E78-615E9D88ED60}"/>
+              </a:ext>
+            </a:extLst>
+          </p:cNvPr>
+          <p:cNvPicPr>
+            <a:picLocks noChangeAspect="1"/>
+          </p:cNvPicPr>
+          <p:nvPr/>
+        </p:nvPicPr>
+        <p:blipFill>
+          <a:blip r:embed="rId3"/>
+          <a:stretch>
+            <a:fillRect/>
+          </a:stretch>
+        </p:blipFill>
+        <p:spPr>
+          <a:xfrm>
+            <a:off x="2592924" y="3691608"/>
+            <a:ext cx="8911688" cy="3001995"/>
+          </a:xfrm>
+          <a:prstGeom prst="rect">
+            <a:avLst/>
+          </a:prstGeom>
+        </p:spPr>
+      </p:pic>
+      <p:pic>
+        <p:nvPicPr>
+          <p:cNvPr id="9" name="Kép 8">
+            <a:extLst>
+              <a:ext uri="{FF2B5EF4-FFF2-40B4-BE49-F238E27FC236}">
+                <a16:creationId xmlns:a16="http://schemas.microsoft.com/office/drawing/2014/main" id="{90C8357C-D29E-BB8D-EA02-E9C605BC1A44}"/>
+              </a:ext>
+            </a:extLst>
+          </p:cNvPr>
+          <p:cNvPicPr>
+            <a:picLocks noChangeAspect="1"/>
+          </p:cNvPicPr>
+          <p:nvPr/>
+        </p:nvPicPr>
+        <p:blipFill>
+          <a:blip r:embed="rId4"/>
+          <a:stretch>
+            <a:fillRect/>
+          </a:stretch>
+        </p:blipFill>
+        <p:spPr>
+          <a:xfrm>
+            <a:off x="6547449" y="1397479"/>
+            <a:ext cx="4957163" cy="2294129"/>
+          </a:xfrm>
+          <a:prstGeom prst="rect">
+            <a:avLst/>
+          </a:prstGeom>
+        </p:spPr>
+      </p:pic>
+    </p:spTree>
+    <p:extLst>
+      <p:ext uri="{BB962C8B-B14F-4D97-AF65-F5344CB8AC3E}">
+        <p14:creationId xmlns:p14="http://schemas.microsoft.com/office/powerpoint/2010/main" val="1536768972"/>
       </p:ext>
     </p:extLst>
   </p:cSld>

--- a/Documents/Prezentáció.pptx
+++ b/Documents/Prezentáció.pptx
@@ -313,7 +313,7 @@
             <a:fld id="{B61BEF0D-F0BB-DE4B-95CE-6DB70DBA9567}" type="datetimeFigureOut">
               <a:rPr lang="en-US" dirty="0"/>
               <a:pPr/>
-              <a:t>9/20/2026</a:t>
+              <a:t>9/30/2026</a:t>
             </a:fld>
             <a:endParaRPr lang="en-US" dirty="0"/>
           </a:p>
@@ -655,7 +655,7 @@
             <a:fld id="{B61BEF0D-F0BB-DE4B-95CE-6DB70DBA9567}" type="datetimeFigureOut">
               <a:rPr lang="en-US" dirty="0"/>
               <a:pPr/>
-              <a:t>9/20/2026</a:t>
+              <a:t>9/30/2026</a:t>
             </a:fld>
             <a:endParaRPr lang="en-US" dirty="0"/>
           </a:p>
@@ -1060,7 +1060,7 @@
             <a:fld id="{B61BEF0D-F0BB-DE4B-95CE-6DB70DBA9567}" type="datetimeFigureOut">
               <a:rPr lang="en-US" dirty="0"/>
               <a:pPr/>
-              <a:t>9/20/2026</a:t>
+              <a:t>9/30/2026</a:t>
             </a:fld>
             <a:endParaRPr lang="en-US" dirty="0"/>
           </a:p>
@@ -1400,7 +1400,7 @@
             <a:fld id="{B61BEF0D-F0BB-DE4B-95CE-6DB70DBA9567}" type="datetimeFigureOut">
               <a:rPr lang="en-US" dirty="0"/>
               <a:pPr/>
-              <a:t>9/20/2026</a:t>
+              <a:t>9/30/2026</a:t>
             </a:fld>
             <a:endParaRPr lang="en-US" dirty="0"/>
           </a:p>
@@ -1724,7 +1724,7 @@
             <a:fld id="{B61BEF0D-F0BB-DE4B-95CE-6DB70DBA9567}" type="datetimeFigureOut">
               <a:rPr lang="en-US" dirty="0"/>
               <a:pPr/>
-              <a:t>9/20/2026</a:t>
+              <a:t>9/30/2026</a:t>
             </a:fld>
             <a:endParaRPr lang="en-US" dirty="0"/>
           </a:p>
@@ -2124,7 +2124,7 @@
             <a:fld id="{B61BEF0D-F0BB-DE4B-95CE-6DB70DBA9567}" type="datetimeFigureOut">
               <a:rPr lang="en-US" dirty="0"/>
               <a:pPr/>
-              <a:t>9/20/2026</a:t>
+              <a:t>9/30/2026</a:t>
             </a:fld>
             <a:endParaRPr lang="en-US" dirty="0"/>
           </a:p>
@@ -2385,7 +2385,7 @@
             <a:fld id="{B61BEF0D-F0BB-DE4B-95CE-6DB70DBA9567}" type="datetimeFigureOut">
               <a:rPr lang="en-US" dirty="0"/>
               <a:pPr/>
-              <a:t>9/20/2026</a:t>
+              <a:t>9/30/2026</a:t>
             </a:fld>
             <a:endParaRPr lang="en-US" dirty="0"/>
           </a:p>
@@ -2651,7 +2651,7 @@
             <a:fld id="{B61BEF0D-F0BB-DE4B-95CE-6DB70DBA9567}" type="datetimeFigureOut">
               <a:rPr lang="en-US" dirty="0"/>
               <a:pPr/>
-              <a:t>9/20/2026</a:t>
+              <a:t>9/30/2026</a:t>
             </a:fld>
             <a:endParaRPr lang="en-US" dirty="0"/>
           </a:p>
@@ -2917,7 +2917,7 @@
             <a:fld id="{B61BEF0D-F0BB-DE4B-95CE-6DB70DBA9567}" type="datetimeFigureOut">
               <a:rPr lang="en-US" dirty="0"/>
               <a:pPr/>
-              <a:t>9/20/2026</a:t>
+              <a:t>9/30/2026</a:t>
             </a:fld>
             <a:endParaRPr lang="en-US" dirty="0"/>
           </a:p>
@@ -3250,7 +3250,7 @@
             <a:fld id="{B61BEF0D-F0BB-DE4B-95CE-6DB70DBA9567}" type="datetimeFigureOut">
               <a:rPr lang="en-US" dirty="0"/>
               <a:pPr/>
-              <a:t>9/20/2026</a:t>
+              <a:t>9/30/2026</a:t>
             </a:fld>
             <a:endParaRPr lang="en-US" dirty="0"/>
           </a:p>
@@ -3577,7 +3577,7 @@
             <a:fld id="{B61BEF0D-F0BB-DE4B-95CE-6DB70DBA9567}" type="datetimeFigureOut">
               <a:rPr lang="en-US" dirty="0"/>
               <a:pPr/>
-              <a:t>9/20/2026</a:t>
+              <a:t>9/30/2026</a:t>
             </a:fld>
             <a:endParaRPr lang="en-US" dirty="0"/>
           </a:p>
@@ -4038,7 +4038,7 @@
             <a:fld id="{B61BEF0D-F0BB-DE4B-95CE-6DB70DBA9567}" type="datetimeFigureOut">
               <a:rPr lang="en-US" dirty="0"/>
               <a:pPr/>
-              <a:t>9/20/2026</a:t>
+              <a:t>9/30/2026</a:t>
             </a:fld>
             <a:endParaRPr lang="en-US" dirty="0"/>
           </a:p>
@@ -4247,7 +4247,7 @@
             <a:fld id="{B61BEF0D-F0BB-DE4B-95CE-6DB70DBA9567}" type="datetimeFigureOut">
               <a:rPr lang="en-US" dirty="0"/>
               <a:pPr/>
-              <a:t>9/20/2026</a:t>
+              <a:t>9/30/2026</a:t>
             </a:fld>
             <a:endParaRPr lang="en-US" dirty="0"/>
           </a:p>
@@ -4428,7 +4428,7 @@
             <a:fld id="{B61BEF0D-F0BB-DE4B-95CE-6DB70DBA9567}" type="datetimeFigureOut">
               <a:rPr lang="en-US" dirty="0"/>
               <a:pPr/>
-              <a:t>9/20/2026</a:t>
+              <a:t>9/30/2026</a:t>
             </a:fld>
             <a:endParaRPr lang="en-US" dirty="0"/>
           </a:p>
@@ -4765,7 +4765,7 @@
             <a:fld id="{B61BEF0D-F0BB-DE4B-95CE-6DB70DBA9567}" type="datetimeFigureOut">
               <a:rPr lang="en-US" dirty="0"/>
               <a:pPr/>
-              <a:t>9/20/2026</a:t>
+              <a:t>9/30/2026</a:t>
             </a:fld>
             <a:endParaRPr lang="en-US" dirty="0"/>
           </a:p>
@@ -5114,7 +5114,7 @@
             <a:fld id="{B61BEF0D-F0BB-DE4B-95CE-6DB70DBA9567}" type="datetimeFigureOut">
               <a:rPr lang="en-US" dirty="0"/>
               <a:pPr/>
-              <a:t>9/20/2026</a:t>
+              <a:t>9/30/2026</a:t>
             </a:fld>
             <a:endParaRPr lang="en-US" dirty="0"/>
           </a:p>
@@ -7410,7 +7410,7 @@
             <a:fld id="{B61BEF0D-F0BB-DE4B-95CE-6DB70DBA9567}" type="datetimeFigureOut">
               <a:rPr lang="en-US" dirty="0"/>
               <a:pPr/>
-              <a:t>9/20/2026</a:t>
+              <a:t>9/30/2026</a:t>
             </a:fld>
             <a:endParaRPr lang="en-US" dirty="0"/>
           </a:p>
@@ -8236,7 +8236,7 @@
         <p:spPr>
           <a:xfrm>
             <a:off x="3872257" y="5719313"/>
-            <a:ext cx="6353021" cy="369332"/>
+            <a:ext cx="6764993" cy="369332"/>
           </a:xfrm>
           <a:prstGeom prst="rect">
             <a:avLst/>
@@ -8257,7 +8257,7 @@
               <a:rPr lang="hu-HU" dirty="0">
                 <a:hlinkClick r:id="rId3"/>
               </a:rPr>
-              <a:t>79.122.13.25:80</a:t>
+              <a:t>Színes négy évszak</a:t>
             </a:r>
             <a:endParaRPr lang="hu-HU" dirty="0"/>
           </a:p>
